--- a/Documentation/SupportFiles/Communications.pptx
+++ b/Documentation/SupportFiles/Communications.pptx
@@ -3353,10 +3353,9 @@
           <a:p>
             <a:pPr algn="ctr"/>
             <a:r>
-              <a:rPr lang="en-US" sz="1200" dirty="0" err="1"/>
+              <a:rPr lang="en-US" sz="1200" dirty="0"/>
               <a:t>Meadow.Core</a:t>
             </a:r>
-            <a:endParaRPr lang="en-US" sz="1200" dirty="0"/>
           </a:p>
         </p:txBody>
       </p:sp>
@@ -5567,12 +5566,8 @@
           <a:p>
             <a:pPr algn="ctr"/>
             <a:r>
-              <a:rPr lang="en-US" sz="1200" dirty="0" err="1"/>
-              <a:t>WiFi</a:t>
-            </a:r>
-            <a:r>
               <a:rPr lang="en-US" sz="1200" dirty="0"/>
-              <a:t> Task</a:t>
+              <a:t>WiFi Task</a:t>
             </a:r>
           </a:p>
         </p:txBody>
